--- a/practice/bai-1-the-thuc.pptx
+++ b/practice/bai-1-the-thuc.pptx
@@ -8614,108 +8614,14 @@
     </a:clrScheme>
     <a:fontScheme name="Office">
       <a:majorFont>
-        <a:latin typeface="Calibri Light" panose="020F0302020204030204"/>
-        <a:ea typeface=""/>
-        <a:cs typeface=""/>
-        <a:font script="Jpan" typeface="游ゴシック Light"/>
-        <a:font script="Hang" typeface="맑은 고딕"/>
-        <a:font script="Hans" typeface="等线 Light"/>
-        <a:font script="Hant" typeface="新細明體"/>
-        <a:font script="Arab" typeface="Times New Roman"/>
-        <a:font script="Hebr" typeface="Times New Roman"/>
-        <a:font script="Thai" typeface="Angsana New"/>
-        <a:font script="Ethi" typeface="Nyala"/>
-        <a:font script="Beng" typeface="Vrinda"/>
-        <a:font script="Gujr" typeface="Shruti"/>
-        <a:font script="Khmr" typeface="MoolBoran"/>
-        <a:font script="Knda" typeface="Tunga"/>
-        <a:font script="Guru" typeface="Raavi"/>
-        <a:font script="Cans" typeface="Euphemia"/>
-        <a:font script="Cher" typeface="Plantagenet Cherokee"/>
-        <a:font script="Yiii" typeface="Microsoft Yi Baiti"/>
-        <a:font script="Tibt" typeface="Microsoft Himalaya"/>
-        <a:font script="Thaa" typeface="MV Boli"/>
-        <a:font script="Deva" typeface="Mangal"/>
-        <a:font script="Telu" typeface="Gautami"/>
-        <a:font script="Taml" typeface="Latha"/>
-        <a:font script="Syrc" typeface="Estrangelo Edessa"/>
-        <a:font script="Orya" typeface="Kalinga"/>
-        <a:font script="Mlym" typeface="Kartika"/>
-        <a:font script="Laoo" typeface="DokChampa"/>
-        <a:font script="Sinh" typeface="Iskoola Pota"/>
-        <a:font script="Mong" typeface="Mongolian Baiti"/>
-        <a:font script="Viet" typeface="Times New Roman"/>
-        <a:font script="Uigh" typeface="Microsoft Uighur"/>
-        <a:font script="Geor" typeface="Sylfaen"/>
-        <a:font script="Armn" typeface="Arial"/>
-        <a:font script="Bugi" typeface="Leelawadee UI"/>
-        <a:font script="Bopo" typeface="Microsoft JhengHei"/>
-        <a:font script="Java" typeface="Javanese Text"/>
-        <a:font script="Lisu" typeface="Segoe UI"/>
-        <a:font script="Mymr" typeface="Myanmar Text"/>
-        <a:font script="Nkoo" typeface="Ebrima"/>
-        <a:font script="Olck" typeface="Nirmala UI"/>
-        <a:font script="Osma" typeface="Ebrima"/>
-        <a:font script="Phag" typeface="Phagspa"/>
-        <a:font script="Syrn" typeface="Estrangelo Edessa"/>
-        <a:font script="Syrj" typeface="Estrangelo Edessa"/>
-        <a:font script="Syre" typeface="Estrangelo Edessa"/>
-        <a:font script="Sora" typeface="Nirmala UI"/>
-        <a:font script="Tale" typeface="Microsoft Tai Le"/>
-        <a:font script="Talu" typeface="Microsoft New Tai Lue"/>
-        <a:font script="Tfng" typeface="Ebrima"/>
+        <a:latin typeface="Cambria" panose="020F0302020204030204"/>
+        <a:ea typeface="Cambria"/>
+        <a:cs typeface="Cambria"/>
       </a:majorFont>
       <a:minorFont>
         <a:latin typeface="Calibri" panose="020F0502020204030204"/>
-        <a:ea typeface=""/>
-        <a:cs typeface=""/>
-        <a:font script="Jpan" typeface="游ゴシック"/>
-        <a:font script="Hang" typeface="맑은 고딕"/>
-        <a:font script="Hans" typeface="等线"/>
-        <a:font script="Hant" typeface="新細明體"/>
-        <a:font script="Arab" typeface="Arial"/>
-        <a:font script="Hebr" typeface="Arial"/>
-        <a:font script="Thai" typeface="Cordia New"/>
-        <a:font script="Ethi" typeface="Nyala"/>
-        <a:font script="Beng" typeface="Vrinda"/>
-        <a:font script="Gujr" typeface="Shruti"/>
-        <a:font script="Khmr" typeface="DaunPenh"/>
-        <a:font script="Knda" typeface="Tunga"/>
-        <a:font script="Guru" typeface="Raavi"/>
-        <a:font script="Cans" typeface="Euphemia"/>
-        <a:font script="Cher" typeface="Plantagenet Cherokee"/>
-        <a:font script="Yiii" typeface="Microsoft Yi Baiti"/>
-        <a:font script="Tibt" typeface="Microsoft Himalaya"/>
-        <a:font script="Thaa" typeface="MV Boli"/>
-        <a:font script="Deva" typeface="Mangal"/>
-        <a:font script="Telu" typeface="Gautami"/>
-        <a:font script="Taml" typeface="Latha"/>
-        <a:font script="Syrc" typeface="Estrangelo Edessa"/>
-        <a:font script="Orya" typeface="Kalinga"/>
-        <a:font script="Mlym" typeface="Kartika"/>
-        <a:font script="Laoo" typeface="DokChampa"/>
-        <a:font script="Sinh" typeface="Iskoola Pota"/>
-        <a:font script="Mong" typeface="Mongolian Baiti"/>
-        <a:font script="Viet" typeface="Arial"/>
-        <a:font script="Uigh" typeface="Microsoft Uighur"/>
-        <a:font script="Geor" typeface="Sylfaen"/>
-        <a:font script="Armn" typeface="Arial"/>
-        <a:font script="Bugi" typeface="Leelawadee UI"/>
-        <a:font script="Bopo" typeface="Microsoft JhengHei"/>
-        <a:font script="Java" typeface="Javanese Text"/>
-        <a:font script="Lisu" typeface="Segoe UI"/>
-        <a:font script="Mymr" typeface="Myanmar Text"/>
-        <a:font script="Nkoo" typeface="Ebrima"/>
-        <a:font script="Olck" typeface="Nirmala UI"/>
-        <a:font script="Osma" typeface="Ebrima"/>
-        <a:font script="Phag" typeface="Phagspa"/>
-        <a:font script="Syrn" typeface="Estrangelo Edessa"/>
-        <a:font script="Syrj" typeface="Estrangelo Edessa"/>
-        <a:font script="Syre" typeface="Estrangelo Edessa"/>
-        <a:font script="Sora" typeface="Nirmala UI"/>
-        <a:font script="Tale" typeface="Microsoft Tai Le"/>
-        <a:font script="Talu" typeface="Microsoft New Tai Lue"/>
-        <a:font script="Tfng" typeface="Ebrima"/>
+        <a:ea typeface="Calibri"/>
+        <a:cs typeface="Calibri"/>
       </a:minorFont>
     </a:fontScheme>
     <a:fmtScheme name="Office">

--- a/practice/bai-1-the-thuc.pptx
+++ b/practice/bai-1-the-thuc.pptx
@@ -3603,7 +3603,7 @@
         <p:spPr>
           <a:xfrm>
             <a:off x="1051560" y="1545336"/>
-            <a:ext cx="10652760" cy="1508760"/>
+            <a:ext cx="10652760" cy="960120"/>
           </a:xfrm>
           <a:prstGeom prst="rect">
             <a:avLst/>
@@ -3655,7 +3655,7 @@
         </p:nvSpPr>
         <p:spPr>
           <a:xfrm>
-            <a:off x="502920" y="3127248"/>
+            <a:off x="502920" y="2578608"/>
             <a:ext cx="384048" cy="384048"/>
           </a:xfrm>
           <a:prstGeom prst="ellipse">
@@ -3679,7 +3679,7 @@
         </p:nvSpPr>
         <p:spPr>
           <a:xfrm>
-            <a:off x="502920" y="3127248"/>
+            <a:off x="502920" y="2578608"/>
             <a:ext cx="384048" cy="384048"/>
           </a:xfrm>
           <a:prstGeom prst="rect">
@@ -3718,8 +3718,8 @@
         </p:nvSpPr>
         <p:spPr>
           <a:xfrm>
-            <a:off x="1051560" y="3054096"/>
-            <a:ext cx="10652760" cy="1508760"/>
+            <a:off x="1051560" y="2505456"/>
+            <a:ext cx="10652760" cy="960120"/>
           </a:xfrm>
           <a:prstGeom prst="rect">
             <a:avLst/>
@@ -3771,7 +3771,7 @@
         </p:nvSpPr>
         <p:spPr>
           <a:xfrm>
-            <a:off x="502920" y="4636008"/>
+            <a:off x="502920" y="3538728"/>
             <a:ext cx="384048" cy="384048"/>
           </a:xfrm>
           <a:prstGeom prst="ellipse">
@@ -3795,7 +3795,7 @@
         </p:nvSpPr>
         <p:spPr>
           <a:xfrm>
-            <a:off x="502920" y="4636008"/>
+            <a:off x="502920" y="3538728"/>
             <a:ext cx="384048" cy="384048"/>
           </a:xfrm>
           <a:prstGeom prst="rect">
@@ -3834,8 +3834,8 @@
         </p:nvSpPr>
         <p:spPr>
           <a:xfrm>
-            <a:off x="1051560" y="4562856"/>
-            <a:ext cx="10652760" cy="1508760"/>
+            <a:off x="1051560" y="3465576"/>
+            <a:ext cx="10652760" cy="960120"/>
           </a:xfrm>
           <a:prstGeom prst="rect">
             <a:avLst/>
@@ -4226,7 +4226,7 @@
         <p:spPr>
           <a:xfrm>
             <a:off x="1051560" y="1545336"/>
-            <a:ext cx="10652760" cy="2263140"/>
+            <a:ext cx="10652760" cy="960120"/>
           </a:xfrm>
           <a:prstGeom prst="rect">
             <a:avLst/>
@@ -4278,7 +4278,7 @@
         </p:nvSpPr>
         <p:spPr>
           <a:xfrm>
-            <a:off x="502920" y="3881628"/>
+            <a:off x="502920" y="2578608"/>
             <a:ext cx="384048" cy="384048"/>
           </a:xfrm>
           <a:prstGeom prst="ellipse">
@@ -4302,7 +4302,7 @@
         </p:nvSpPr>
         <p:spPr>
           <a:xfrm>
-            <a:off x="502920" y="3881628"/>
+            <a:off x="502920" y="2578608"/>
             <a:ext cx="384048" cy="384048"/>
           </a:xfrm>
           <a:prstGeom prst="rect">
@@ -4341,8 +4341,8 @@
         </p:nvSpPr>
         <p:spPr>
           <a:xfrm>
-            <a:off x="1051560" y="3808476"/>
-            <a:ext cx="10652760" cy="2263140"/>
+            <a:off x="1051560" y="2505456"/>
+            <a:ext cx="10652760" cy="960120"/>
           </a:xfrm>
           <a:prstGeom prst="rect">
             <a:avLst/>

--- a/practice/bai-1-the-thuc.pptx
+++ b/practice/bai-1-the-thuc.pptx
@@ -1876,7 +1876,7 @@
       </p:sp>
       <p:pic>
         <p:nvPicPr>
-          <p:cNvPr id="3" name="Image 0" descr="assets/logo_tron.png">    </p:cNvPr>
+          <p:cNvPr id="3" name="Image 0" descr="/home/user/comdraft/assets/img/dau-huong.png">    </p:cNvPr>
           <p:cNvPicPr>
             <a:picLocks noChangeAspect="1"/>
           </p:cNvPicPr>
@@ -1902,7 +1902,7 @@
       </p:pic>
       <p:pic>
         <p:nvPicPr>
-          <p:cNvPr id="4" name="Image 1" descr="assets/logo_ngang.png">    </p:cNvPr>
+          <p:cNvPr id="4" name="Image 1" descr="/home/user/comdraft/assets/img/lockup-huong.png">    </p:cNvPr>
           <p:cNvPicPr>
             <a:picLocks noChangeAspect="1"/>
           </p:cNvPicPr>
@@ -2218,7 +2218,7 @@
       </p:grpSpPr>
       <p:pic>
         <p:nvPicPr>
-          <p:cNvPr id="2" name="Image 0" descr="assets/logo_tron.png">    </p:cNvPr>
+          <p:cNvPr id="2" name="Image 0" descr="/home/user/comdraft/assets/img/dau-huong.png">    </p:cNvPr>
           <p:cNvPicPr>
             <a:picLocks noChangeAspect="1"/>
           </p:cNvPicPr>
@@ -2754,7 +2754,7 @@
       </p:grpSpPr>
       <p:pic>
         <p:nvPicPr>
-          <p:cNvPr id="2" name="Image 0" descr="assets/logo_tron.png">    </p:cNvPr>
+          <p:cNvPr id="2" name="Image 0" descr="/home/user/comdraft/assets/img/dau-huong.png">    </p:cNvPr>
           <p:cNvPicPr>
             <a:picLocks noChangeAspect="1"/>
           </p:cNvPicPr>
@@ -3290,7 +3290,7 @@
       </p:grpSpPr>
       <p:pic>
         <p:nvPicPr>
-          <p:cNvPr id="2" name="Image 0" descr="assets/logo_tron.png">    </p:cNvPr>
+          <p:cNvPr id="2" name="Image 0" descr="/home/user/comdraft/assets/img/dau-huong.png">    </p:cNvPr>
           <p:cNvPicPr>
             <a:picLocks noChangeAspect="1"/>
           </p:cNvPicPr>
@@ -3913,7 +3913,7 @@
       </p:grpSpPr>
       <p:pic>
         <p:nvPicPr>
-          <p:cNvPr id="2" name="Image 0" descr="assets/logo_tron.png">    </p:cNvPr>
+          <p:cNvPr id="2" name="Image 0" descr="/home/user/comdraft/assets/img/dau-huong.png">    </p:cNvPr>
           <p:cNvPicPr>
             <a:picLocks noChangeAspect="1"/>
           </p:cNvPicPr>
@@ -4420,7 +4420,7 @@
       </p:grpSpPr>
       <p:pic>
         <p:nvPicPr>
-          <p:cNvPr id="2" name="Image 0" descr="assets/logo_tron.png">    </p:cNvPr>
+          <p:cNvPr id="2" name="Image 0" descr="/home/user/comdraft/assets/img/dau-huong.png">    </p:cNvPr>
           <p:cNvPicPr>
             <a:picLocks noChangeAspect="1"/>
           </p:cNvPicPr>
@@ -5230,7 +5230,7 @@
       </p:grpSpPr>
       <p:pic>
         <p:nvPicPr>
-          <p:cNvPr id="2" name="Image 0" descr="assets/logo_tron.png">    </p:cNvPr>
+          <p:cNvPr id="2" name="Image 0" descr="/home/user/comdraft/assets/img/dau-huong.png">    </p:cNvPr>
           <p:cNvPicPr>
             <a:picLocks noChangeAspect="1"/>
           </p:cNvPicPr>
@@ -5853,7 +5853,7 @@
       </p:grpSpPr>
       <p:pic>
         <p:nvPicPr>
-          <p:cNvPr id="2" name="Image 0" descr="assets/logo_tron.png">    </p:cNvPr>
+          <p:cNvPr id="2" name="Image 0" descr="/home/user/comdraft/assets/img/dau-huong.png">    </p:cNvPr>
           <p:cNvPicPr>
             <a:picLocks noChangeAspect="1"/>
           </p:cNvPicPr>
@@ -6110,7 +6110,7 @@
         </p:blipFill>
         <p:spPr>
           <a:xfrm>
-            <a:off x="472287" y="1481328"/>
+            <a:off x="472287" y="1595135"/>
             <a:ext cx="11247120" cy="4481544"/>
           </a:xfrm>
           <a:prstGeom prst="rect">
@@ -6152,7 +6152,7 @@
       </p:grpSpPr>
       <p:pic>
         <p:nvPicPr>
-          <p:cNvPr id="2" name="Image 0" descr="assets/logo_tron.png">    </p:cNvPr>
+          <p:cNvPr id="2" name="Image 0" descr="/home/user/comdraft/assets/img/dau-huong.png">    </p:cNvPr>
           <p:cNvPicPr>
             <a:picLocks noChangeAspect="1"/>
           </p:cNvPicPr>
@@ -6775,7 +6775,7 @@
       </p:grpSpPr>
       <p:pic>
         <p:nvPicPr>
-          <p:cNvPr id="2" name="Image 0" descr="assets/logo_tron.png">    </p:cNvPr>
+          <p:cNvPr id="2" name="Image 0" descr="/home/user/comdraft/assets/img/dau-huong.png">    </p:cNvPr>
           <p:cNvPicPr>
             <a:picLocks noChangeAspect="1"/>
           </p:cNvPicPr>
@@ -7866,7 +7866,7 @@
       </p:grpSpPr>
       <p:pic>
         <p:nvPicPr>
-          <p:cNvPr id="2" name="Image 0" descr="assets/logo_tron.png">    </p:cNvPr>
+          <p:cNvPr id="2" name="Image 0" descr="/home/user/comdraft/assets/img/dau-huong.png">    </p:cNvPr>
           <p:cNvPicPr>
             <a:picLocks noChangeAspect="1"/>
           </p:cNvPicPr>
@@ -8614,14 +8614,108 @@
     </a:clrScheme>
     <a:fontScheme name="Office">
       <a:majorFont>
-        <a:latin typeface="Cambria" panose="020F0302020204030204"/>
-        <a:ea typeface="Cambria"/>
-        <a:cs typeface="Cambria"/>
+        <a:latin typeface="Calibri Light" panose="020F0302020204030204"/>
+        <a:ea typeface=""/>
+        <a:cs typeface=""/>
+        <a:font script="Jpan" typeface="游ゴシック Light"/>
+        <a:font script="Hang" typeface="맑은 고딕"/>
+        <a:font script="Hans" typeface="等线 Light"/>
+        <a:font script="Hant" typeface="新細明體"/>
+        <a:font script="Arab" typeface="Times New Roman"/>
+        <a:font script="Hebr" typeface="Times New Roman"/>
+        <a:font script="Thai" typeface="Angsana New"/>
+        <a:font script="Ethi" typeface="Nyala"/>
+        <a:font script="Beng" typeface="Vrinda"/>
+        <a:font script="Gujr" typeface="Shruti"/>
+        <a:font script="Khmr" typeface="MoolBoran"/>
+        <a:font script="Knda" typeface="Tunga"/>
+        <a:font script="Guru" typeface="Raavi"/>
+        <a:font script="Cans" typeface="Euphemia"/>
+        <a:font script="Cher" typeface="Plantagenet Cherokee"/>
+        <a:font script="Yiii" typeface="Microsoft Yi Baiti"/>
+        <a:font script="Tibt" typeface="Microsoft Himalaya"/>
+        <a:font script="Thaa" typeface="MV Boli"/>
+        <a:font script="Deva" typeface="Mangal"/>
+        <a:font script="Telu" typeface="Gautami"/>
+        <a:font script="Taml" typeface="Latha"/>
+        <a:font script="Syrc" typeface="Estrangelo Edessa"/>
+        <a:font script="Orya" typeface="Kalinga"/>
+        <a:font script="Mlym" typeface="Kartika"/>
+        <a:font script="Laoo" typeface="DokChampa"/>
+        <a:font script="Sinh" typeface="Iskoola Pota"/>
+        <a:font script="Mong" typeface="Mongolian Baiti"/>
+        <a:font script="Viet" typeface="Times New Roman"/>
+        <a:font script="Uigh" typeface="Microsoft Uighur"/>
+        <a:font script="Geor" typeface="Sylfaen"/>
+        <a:font script="Armn" typeface="Arial"/>
+        <a:font script="Bugi" typeface="Leelawadee UI"/>
+        <a:font script="Bopo" typeface="Microsoft JhengHei"/>
+        <a:font script="Java" typeface="Javanese Text"/>
+        <a:font script="Lisu" typeface="Segoe UI"/>
+        <a:font script="Mymr" typeface="Myanmar Text"/>
+        <a:font script="Nkoo" typeface="Ebrima"/>
+        <a:font script="Olck" typeface="Nirmala UI"/>
+        <a:font script="Osma" typeface="Ebrima"/>
+        <a:font script="Phag" typeface="Phagspa"/>
+        <a:font script="Syrn" typeface="Estrangelo Edessa"/>
+        <a:font script="Syrj" typeface="Estrangelo Edessa"/>
+        <a:font script="Syre" typeface="Estrangelo Edessa"/>
+        <a:font script="Sora" typeface="Nirmala UI"/>
+        <a:font script="Tale" typeface="Microsoft Tai Le"/>
+        <a:font script="Talu" typeface="Microsoft New Tai Lue"/>
+        <a:font script="Tfng" typeface="Ebrima"/>
       </a:majorFont>
       <a:minorFont>
         <a:latin typeface="Calibri" panose="020F0502020204030204"/>
-        <a:ea typeface="Calibri"/>
-        <a:cs typeface="Calibri"/>
+        <a:ea typeface=""/>
+        <a:cs typeface=""/>
+        <a:font script="Jpan" typeface="游ゴシック"/>
+        <a:font script="Hang" typeface="맑은 고딕"/>
+        <a:font script="Hans" typeface="等线"/>
+        <a:font script="Hant" typeface="新細明體"/>
+        <a:font script="Arab" typeface="Arial"/>
+        <a:font script="Hebr" typeface="Arial"/>
+        <a:font script="Thai" typeface="Cordia New"/>
+        <a:font script="Ethi" typeface="Nyala"/>
+        <a:font script="Beng" typeface="Vrinda"/>
+        <a:font script="Gujr" typeface="Shruti"/>
+        <a:font script="Khmr" typeface="DaunPenh"/>
+        <a:font script="Knda" typeface="Tunga"/>
+        <a:font script="Guru" typeface="Raavi"/>
+        <a:font script="Cans" typeface="Euphemia"/>
+        <a:font script="Cher" typeface="Plantagenet Cherokee"/>
+        <a:font script="Yiii" typeface="Microsoft Yi Baiti"/>
+        <a:font script="Tibt" typeface="Microsoft Himalaya"/>
+        <a:font script="Thaa" typeface="MV Boli"/>
+        <a:font script="Deva" typeface="Mangal"/>
+        <a:font script="Telu" typeface="Gautami"/>
+        <a:font script="Taml" typeface="Latha"/>
+        <a:font script="Syrc" typeface="Estrangelo Edessa"/>
+        <a:font script="Orya" typeface="Kalinga"/>
+        <a:font script="Mlym" typeface="Kartika"/>
+        <a:font script="Laoo" typeface="DokChampa"/>
+        <a:font script="Sinh" typeface="Iskoola Pota"/>
+        <a:font script="Mong" typeface="Mongolian Baiti"/>
+        <a:font script="Viet" typeface="Arial"/>
+        <a:font script="Uigh" typeface="Microsoft Uighur"/>
+        <a:font script="Geor" typeface="Sylfaen"/>
+        <a:font script="Armn" typeface="Arial"/>
+        <a:font script="Bugi" typeface="Leelawadee UI"/>
+        <a:font script="Bopo" typeface="Microsoft JhengHei"/>
+        <a:font script="Java" typeface="Javanese Text"/>
+        <a:font script="Lisu" typeface="Segoe UI"/>
+        <a:font script="Mymr" typeface="Myanmar Text"/>
+        <a:font script="Nkoo" typeface="Ebrima"/>
+        <a:font script="Olck" typeface="Nirmala UI"/>
+        <a:font script="Osma" typeface="Ebrima"/>
+        <a:font script="Phag" typeface="Phagspa"/>
+        <a:font script="Syrn" typeface="Estrangelo Edessa"/>
+        <a:font script="Syrj" typeface="Estrangelo Edessa"/>
+        <a:font script="Syre" typeface="Estrangelo Edessa"/>
+        <a:font script="Sora" typeface="Nirmala UI"/>
+        <a:font script="Tale" typeface="Microsoft Tai Le"/>
+        <a:font script="Talu" typeface="Microsoft New Tai Lue"/>
+        <a:font script="Tfng" typeface="Ebrima"/>
       </a:minorFont>
     </a:fontScheme>
     <a:fmtScheme name="Office">

--- a/practice/bai-1-the-thuc.pptx
+++ b/practice/bai-1-the-thuc.pptx
@@ -5471,351 +5471,62 @@
           </a:p>
         </p:txBody>
       </p:sp>
-      <p:sp>
-        <p:nvSpPr>
-          <p:cNvPr id="9" name="Shape 6"/>
-          <p:cNvSpPr/>
-          <p:nvPr/>
-        </p:nvSpPr>
-        <p:spPr>
-          <a:xfrm>
-            <a:off x="502920" y="1417320"/>
-            <a:ext cx="5509260" cy="2308860"/>
-          </a:xfrm>
-          <a:prstGeom prst="roundRect">
-            <a:avLst>
-              <a:gd name="adj" fmla="val 3564"/>
-            </a:avLst>
-          </a:prstGeom>
-          <a:solidFill>
-            <a:srgbClr val="FDF1EF"/>
-          </a:solidFill>
-          <a:ln w="15875">
-            <a:solidFill>
-              <a:srgbClr val="FBCEC9"/>
-            </a:solidFill>
-            <a:prstDash val="solid"/>
-          </a:ln>
-        </p:spPr>
-        <p:txBody>
-          <a:bodyPr/>
-          <a:p/>
-        </p:txBody>
-      </p:sp>
-      <p:sp>
-        <p:nvSpPr>
-          <p:cNvPr id="10" name="Text 7"/>
-          <p:cNvSpPr/>
-          <p:nvPr/>
-        </p:nvSpPr>
-        <p:spPr>
-          <a:xfrm>
-            <a:off x="722376" y="1490472"/>
-            <a:ext cx="5070348" cy="2162556"/>
-          </a:xfrm>
-          <a:prstGeom prst="rect">
-            <a:avLst/>
-          </a:prstGeom>
-          <a:noFill/>
-          <a:ln/>
-        </p:spPr>
-        <p:txBody>
-          <a:bodyPr wrap="square" lIns="0" tIns="0" rIns="0" bIns="0" rtlCol="0" anchor="ctr"/>
-          <a:lstStyle/>
-          <a:p>
-            <a:pPr indent="0" marL="0">
-              <a:buNone/>
-            </a:pPr>
-            <a:r>
-              <a:rPr lang="en-US" sz="1500" b="1" dirty="0">
-                <a:solidFill>
-                  <a:srgbClr val="AC4D33"/>
-                </a:solidFill>
-                <a:latin typeface="Calibri" pitchFamily="34" charset="0"/>
-                <a:ea typeface="Calibri" pitchFamily="34" charset="-122"/>
-                <a:cs typeface="Calibri" pitchFamily="34" charset="-120"/>
-              </a:rPr>
-              <a:t>Khổ giấy</a:t>
-            </a:r>
-            <a:endParaRPr lang="en-US" sz="1500" dirty="0"/>
-          </a:p>
-          <a:p>
-            <a:pPr indent="0" marL="0">
-              <a:buNone/>
-            </a:pPr>
-            <a:r>
-              <a:rPr lang="en-US" sz="1250" dirty="0">
-                <a:solidFill>
-                  <a:srgbClr val="3A2B28"/>
-                </a:solidFill>
-                <a:latin typeface="Calibri" pitchFamily="34" charset="0"/>
-                <a:ea typeface="Calibri" pitchFamily="34" charset="-122"/>
-                <a:cs typeface="Calibri" pitchFamily="34" charset="-120"/>
-              </a:rPr>
-              <a:t>Layout → Size → A4 (210 × 297 mm). Không dùng Letter.</a:t>
-            </a:r>
-            <a:endParaRPr lang="en-US" sz="1500" dirty="0"/>
-          </a:p>
-        </p:txBody>
-      </p:sp>
-      <p:sp>
-        <p:nvSpPr>
-          <p:cNvPr id="11" name="Shape 8"/>
-          <p:cNvSpPr/>
-          <p:nvPr/>
-        </p:nvSpPr>
-        <p:spPr>
-          <a:xfrm>
-            <a:off x="6195060" y="1417320"/>
-            <a:ext cx="5509260" cy="2308860"/>
-          </a:xfrm>
-          <a:prstGeom prst="roundRect">
-            <a:avLst>
-              <a:gd name="adj" fmla="val 3564"/>
-            </a:avLst>
-          </a:prstGeom>
-          <a:solidFill>
-            <a:srgbClr val="FDF1EF"/>
-          </a:solidFill>
-          <a:ln w="15875">
-            <a:solidFill>
-              <a:srgbClr val="FBCEC9"/>
-            </a:solidFill>
-            <a:prstDash val="solid"/>
-          </a:ln>
-        </p:spPr>
-        <p:txBody>
-          <a:bodyPr/>
-          <a:p/>
-        </p:txBody>
-      </p:sp>
-      <p:sp>
-        <p:nvSpPr>
-          <p:cNvPr id="12" name="Text 9"/>
-          <p:cNvSpPr/>
-          <p:nvPr/>
-        </p:nvSpPr>
-        <p:spPr>
-          <a:xfrm>
-            <a:off x="6414516" y="1490472"/>
-            <a:ext cx="5070348" cy="2162556"/>
-          </a:xfrm>
-          <a:prstGeom prst="rect">
-            <a:avLst/>
-          </a:prstGeom>
-          <a:noFill/>
-          <a:ln/>
-        </p:spPr>
-        <p:txBody>
-          <a:bodyPr wrap="square" lIns="0" tIns="0" rIns="0" bIns="0" rtlCol="0" anchor="ctr"/>
-          <a:lstStyle/>
-          <a:p>
-            <a:pPr indent="0" marL="0">
-              <a:buNone/>
-            </a:pPr>
-            <a:r>
-              <a:rPr lang="en-US" sz="1500" b="1" dirty="0">
-                <a:solidFill>
-                  <a:srgbClr val="AC4D33"/>
-                </a:solidFill>
-                <a:latin typeface="Calibri" pitchFamily="34" charset="0"/>
-                <a:ea typeface="Calibri" pitchFamily="34" charset="-122"/>
-                <a:cs typeface="Calibri" pitchFamily="34" charset="-120"/>
-              </a:rPr>
-              <a:t>Lề trang</a:t>
-            </a:r>
-            <a:endParaRPr lang="en-US" sz="1500" dirty="0"/>
-          </a:p>
-          <a:p>
-            <a:pPr indent="0" marL="0">
-              <a:buNone/>
-            </a:pPr>
-            <a:r>
-              <a:rPr lang="en-US" sz="1250" dirty="0">
-                <a:solidFill>
-                  <a:srgbClr val="3A2B28"/>
-                </a:solidFill>
-                <a:latin typeface="Calibri" pitchFamily="34" charset="0"/>
-                <a:ea typeface="Calibri" pitchFamily="34" charset="-122"/>
-                <a:cs typeface="Calibri" pitchFamily="34" charset="-120"/>
-              </a:rPr>
-              <a:t>Layout → Margins → Custom: Top 20–25 mm, Bottom 20–25 mm, Left 30–35 mm, Right 15–20 mm.</a:t>
-            </a:r>
-            <a:endParaRPr lang="en-US" sz="1500" dirty="0"/>
-          </a:p>
-        </p:txBody>
-      </p:sp>
-      <p:sp>
-        <p:nvSpPr>
-          <p:cNvPr id="13" name="Shape 10"/>
-          <p:cNvSpPr/>
-          <p:nvPr/>
-        </p:nvSpPr>
-        <p:spPr>
-          <a:xfrm>
-            <a:off x="502920" y="3909060"/>
-            <a:ext cx="5509260" cy="2308860"/>
-          </a:xfrm>
-          <a:prstGeom prst="roundRect">
-            <a:avLst>
-              <a:gd name="adj" fmla="val 3564"/>
-            </a:avLst>
-          </a:prstGeom>
-          <a:solidFill>
-            <a:srgbClr val="FDF1EF"/>
-          </a:solidFill>
-          <a:ln w="15875">
-            <a:solidFill>
-              <a:srgbClr val="FBCEC9"/>
-            </a:solidFill>
-            <a:prstDash val="solid"/>
-          </a:ln>
-        </p:spPr>
-        <p:txBody>
-          <a:bodyPr/>
-          <a:p/>
-        </p:txBody>
-      </p:sp>
-      <p:sp>
-        <p:nvSpPr>
-          <p:cNvPr id="14" name="Text 11"/>
-          <p:cNvSpPr/>
-          <p:nvPr/>
-        </p:nvSpPr>
-        <p:spPr>
-          <a:xfrm>
-            <a:off x="722376" y="3982212"/>
-            <a:ext cx="5070348" cy="2162556"/>
-          </a:xfrm>
-          <a:prstGeom prst="rect">
-            <a:avLst/>
-          </a:prstGeom>
-          <a:noFill/>
-          <a:ln/>
-        </p:spPr>
-        <p:txBody>
-          <a:bodyPr wrap="square" lIns="0" tIns="0" rIns="0" bIns="0" rtlCol="0" anchor="ctr"/>
-          <a:lstStyle/>
-          <a:p>
-            <a:pPr indent="0" marL="0">
-              <a:buNone/>
-            </a:pPr>
-            <a:r>
-              <a:rPr lang="en-US" sz="1500" b="1" dirty="0">
-                <a:solidFill>
-                  <a:srgbClr val="AC4D33"/>
-                </a:solidFill>
-                <a:latin typeface="Calibri" pitchFamily="34" charset="0"/>
-                <a:ea typeface="Calibri" pitchFamily="34" charset="-122"/>
-                <a:cs typeface="Calibri" pitchFamily="34" charset="-120"/>
-              </a:rPr>
-              <a:t>Phông chữ</a:t>
-            </a:r>
-            <a:endParaRPr lang="en-US" sz="1500" dirty="0"/>
-          </a:p>
-          <a:p>
-            <a:pPr indent="0" marL="0">
-              <a:buNone/>
-            </a:pPr>
-            <a:r>
-              <a:rPr lang="en-US" sz="1250" dirty="0">
-                <a:solidFill>
-                  <a:srgbClr val="3A2B28"/>
-                </a:solidFill>
-                <a:latin typeface="Calibri" pitchFamily="34" charset="0"/>
-                <a:ea typeface="Calibri" pitchFamily="34" charset="-122"/>
-                <a:cs typeface="Calibri" pitchFamily="34" charset="-120"/>
-              </a:rPr>
-              <a:t>Times New Roman, cỡ 13 – 14, màu đen, bộ mã Unicode (kiểm tra gõ tiếng Việt có dấu).</a:t>
-            </a:r>
-            <a:endParaRPr lang="en-US" sz="1500" dirty="0"/>
-          </a:p>
-        </p:txBody>
-      </p:sp>
-      <p:sp>
-        <p:nvSpPr>
-          <p:cNvPr id="15" name="Shape 12"/>
-          <p:cNvSpPr/>
-          <p:nvPr/>
-        </p:nvSpPr>
-        <p:spPr>
-          <a:xfrm>
-            <a:off x="6195060" y="3909060"/>
-            <a:ext cx="5509260" cy="2308860"/>
-          </a:xfrm>
-          <a:prstGeom prst="roundRect">
-            <a:avLst>
-              <a:gd name="adj" fmla="val 3564"/>
-            </a:avLst>
-          </a:prstGeom>
-          <a:solidFill>
-            <a:srgbClr val="FDF1EF"/>
-          </a:solidFill>
-          <a:ln w="15875">
-            <a:solidFill>
-              <a:srgbClr val="FBCEC9"/>
-            </a:solidFill>
-            <a:prstDash val="solid"/>
-          </a:ln>
-        </p:spPr>
-        <p:txBody>
-          <a:bodyPr/>
-          <a:p/>
-        </p:txBody>
-      </p:sp>
-      <p:sp>
-        <p:nvSpPr>
-          <p:cNvPr id="16" name="Text 13"/>
-          <p:cNvSpPr/>
-          <p:nvPr/>
-        </p:nvSpPr>
-        <p:spPr>
-          <a:xfrm>
-            <a:off x="6414516" y="3982212"/>
-            <a:ext cx="5070348" cy="2162556"/>
-          </a:xfrm>
-          <a:prstGeom prst="rect">
-            <a:avLst/>
-          </a:prstGeom>
-          <a:noFill/>
-          <a:ln/>
-        </p:spPr>
-        <p:txBody>
-          <a:bodyPr wrap="square" lIns="0" tIns="0" rIns="0" bIns="0" rtlCol="0" anchor="ctr"/>
-          <a:lstStyle/>
-          <a:p>
-            <a:pPr indent="0" marL="0">
-              <a:buNone/>
-            </a:pPr>
-            <a:r>
-              <a:rPr lang="en-US" sz="1500" b="1" dirty="0">
-                <a:solidFill>
-                  <a:srgbClr val="AC4D33"/>
-                </a:solidFill>
-                <a:latin typeface="Calibri" pitchFamily="34" charset="0"/>
-                <a:ea typeface="Calibri" pitchFamily="34" charset="-122"/>
-                <a:cs typeface="Calibri" pitchFamily="34" charset="-120"/>
-              </a:rPr>
-              <a:t>Số trang</a:t>
-            </a:r>
-            <a:endParaRPr lang="en-US" sz="1500" dirty="0"/>
-          </a:p>
-          <a:p>
-            <a:pPr indent="0" marL="0">
-              <a:buNone/>
-            </a:pPr>
-            <a:r>
-              <a:rPr lang="en-US" sz="1250" dirty="0">
-                <a:solidFill>
-                  <a:srgbClr val="3A2B28"/>
-                </a:solidFill>
-                <a:latin typeface="Calibri" pitchFamily="34" charset="0"/>
-                <a:ea typeface="Calibri" pitchFamily="34" charset="-122"/>
-                <a:cs typeface="Calibri" pitchFamily="34" charset="-120"/>
-              </a:rPr>
-              <a:t>Insert → Page Number → Top of Page → Center; bỏ số trang ở trang đầu (Different First Page).</a:t>
-            </a:r>
-            <a:endParaRPr lang="en-US" sz="1500" dirty="0"/>
+      <p:pic>
+        <p:nvPicPr>
+          <p:cNvPr id="9" name="Picture 8" descr="th1-kho-giay-le-trang-nt.png"/>
+          <p:cNvPicPr>
+            <a:picLocks noChangeAspect="1"/>
+          </p:cNvPicPr>
+          <p:nvPr/>
+        </p:nvPicPr>
+        <p:blipFill>
+          <a:blip r:embed="rId4"/>
+          <a:stretch>
+            <a:fillRect/>
+          </a:stretch>
+        </p:blipFill>
+        <p:spPr>
+          <a:xfrm>
+            <a:off x="834921" y="1713396"/>
+            <a:ext cx="10521852" cy="4245023"/>
+          </a:xfrm>
+          <a:prstGeom prst="rect">
+            <a:avLst/>
+          </a:prstGeom>
+        </p:spPr>
+      </p:pic>
+      <p:sp>
+        <p:nvSpPr>
+          <p:cNvPr id="10" name="TextBox 9"/>
+          <p:cNvSpPr txBox="1"/>
+          <p:nvPr/>
+        </p:nvSpPr>
+        <p:spPr>
+          <a:xfrm>
+            <a:off x="548640" y="6031571"/>
+            <a:ext cx="11109960" cy="310896"/>
+          </a:xfrm>
+          <a:prstGeom prst="rect">
+            <a:avLst/>
+          </a:prstGeom>
+          <a:noFill/>
+        </p:spPr>
+        <p:txBody>
+          <a:bodyPr wrap="square">
+            <a:spAutoFit/>
+          </a:bodyPr>
+          <a:lstStyle/>
+          <a:p>
+            <a:pPr algn="ctr"/>
+            <a:r>
+              <a:rPr sz="1150" i="1">
+                <a:solidFill>
+                  <a:srgbClr val="8A7A76"/>
+                </a:solidFill>
+                <a:latin typeface="Calibri"/>
+              </a:rPr>
+              <a:t>Bốn con số lề phải đặt đúng bốn phía — lề trái rộng hơn vì còn phải đóng gáy.</a:t>
+            </a:r>
           </a:p>
         </p:txBody>
       </p:sp>

--- a/practice/bai-1-the-thuc.pptx
+++ b/practice/bai-1-the-thuc.pptx
@@ -1476,10 +1476,28 @@
           <a:lstStyle/>
           <a:p>
             <a:r>
-              <a:rPr lang="en-US" dirty="0"/>
-              <a:t/>
-            </a:r>
-            <a:endParaRPr lang="en-US" dirty="0"/>
+              <a:t>LÀM BÀI (20 phút)</a:t>
+            </a:r>
+          </a:p>
+          <a:p>
+            <a:r>
+              <a:t>• Phát tình huống, nhắc: phần thân chỉ 3–5 dòng.</a:t>
+            </a:r>
+          </a:p>
+          <a:p>
+            <a:r>
+              <a:t>• Cô đi từng bàn hỗ trợ, ghi lại lỗi phổ biến.</a:t>
+            </a:r>
+          </a:p>
+          <a:p>
+            <a:r>
+              <a:t>• Còn 5 phút: nhắc cả lớp lưu file đúng tên "HoTen_Lop_Bai1.docx" rồi nộp.</a:t>
+            </a:r>
+          </a:p>
+          <a:p>
+            <a:r>
+              <a:t>• Chốt buổi: nêu 3 lỗi phổ biến nhất vừa quan sát được.</a:t>
+            </a:r>
           </a:p>
         </p:txBody>
       </p:sp>

--- a/practice/bai-1-the-thuc.pptx
+++ b/practice/bai-1-the-thuc.pptx
@@ -2273,7 +2273,7 @@
                 <a:ea typeface="Calibri" pitchFamily="34" charset="-122"/>
                 <a:cs typeface="Calibri" pitchFamily="34" charset="-120"/>
               </a:rPr>
-              <a:t>Je m'appelle Huong  •  GV. Đỗ Thùy Hương  •  EC1103</a:t>
+              <a:t>Je m'appelle Huong  •  GV. Đỗ Thùy Hương  •  EC6000TX</a:t>
             </a:r>
             <a:endParaRPr lang="en-US" sz="900" dirty="0"/>
           </a:p>
@@ -2809,7 +2809,7 @@
                 <a:ea typeface="Calibri" pitchFamily="34" charset="-122"/>
                 <a:cs typeface="Calibri" pitchFamily="34" charset="-120"/>
               </a:rPr>
-              <a:t>Je m'appelle Huong  •  GV. Đỗ Thùy Hương  •  EC1103</a:t>
+              <a:t>Je m'appelle Huong  •  GV. Đỗ Thùy Hương  •  EC6000TX</a:t>
             </a:r>
             <a:endParaRPr lang="en-US" sz="900" dirty="0"/>
           </a:p>
@@ -3345,7 +3345,7 @@
                 <a:ea typeface="Calibri" pitchFamily="34" charset="-122"/>
                 <a:cs typeface="Calibri" pitchFamily="34" charset="-120"/>
               </a:rPr>
-              <a:t>Je m'appelle Huong  •  GV. Đỗ Thùy Hương  •  EC1103</a:t>
+              <a:t>Je m'appelle Huong  •  GV. Đỗ Thùy Hương  •  EC6000TX</a:t>
             </a:r>
             <a:endParaRPr lang="en-US" sz="900" dirty="0"/>
           </a:p>
@@ -3968,7 +3968,7 @@
                 <a:ea typeface="Calibri" pitchFamily="34" charset="-122"/>
                 <a:cs typeface="Calibri" pitchFamily="34" charset="-120"/>
               </a:rPr>
-              <a:t>Je m'appelle Huong  •  GV. Đỗ Thùy Hương  •  EC1103</a:t>
+              <a:t>Je m'appelle Huong  •  GV. Đỗ Thùy Hương  •  EC6000TX</a:t>
             </a:r>
             <a:endParaRPr lang="en-US" sz="900" dirty="0"/>
           </a:p>
@@ -4475,7 +4475,7 @@
                 <a:ea typeface="Calibri" pitchFamily="34" charset="-122"/>
                 <a:cs typeface="Calibri" pitchFamily="34" charset="-120"/>
               </a:rPr>
-              <a:t>Je m'appelle Huong  •  GV. Đỗ Thùy Hương  •  EC1103</a:t>
+              <a:t>Je m'appelle Huong  •  GV. Đỗ Thùy Hương  •  EC6000TX</a:t>
             </a:r>
             <a:endParaRPr lang="en-US" sz="900" dirty="0"/>
           </a:p>
@@ -5285,7 +5285,7 @@
                 <a:ea typeface="Calibri" pitchFamily="34" charset="-122"/>
                 <a:cs typeface="Calibri" pitchFamily="34" charset="-120"/>
               </a:rPr>
-              <a:t>Je m'appelle Huong  •  GV. Đỗ Thùy Hương  •  EC1103</a:t>
+              <a:t>Je m'appelle Huong  •  GV. Đỗ Thùy Hương  •  EC6000TX</a:t>
             </a:r>
             <a:endParaRPr lang="en-US" sz="900" dirty="0"/>
           </a:p>
@@ -5908,7 +5908,7 @@
                 <a:ea typeface="Calibri" pitchFamily="34" charset="-122"/>
                 <a:cs typeface="Calibri" pitchFamily="34" charset="-120"/>
               </a:rPr>
-              <a:t>Je m'appelle Huong  •  GV. Đỗ Thùy Hương  •  EC1103</a:t>
+              <a:t>Je m'appelle Huong  •  GV. Đỗ Thùy Hương  •  EC6000TX</a:t>
             </a:r>
             <a:endParaRPr lang="en-US" sz="900" dirty="0"/>
           </a:p>
@@ -6207,7 +6207,7 @@
                 <a:ea typeface="Calibri" pitchFamily="34" charset="-122"/>
                 <a:cs typeface="Calibri" pitchFamily="34" charset="-120"/>
               </a:rPr>
-              <a:t>Je m'appelle Huong  •  GV. Đỗ Thùy Hương  •  EC1103</a:t>
+              <a:t>Je m'appelle Huong  •  GV. Đỗ Thùy Hương  •  EC6000TX</a:t>
             </a:r>
             <a:endParaRPr lang="en-US" sz="900" dirty="0"/>
           </a:p>
@@ -6830,7 +6830,7 @@
                 <a:ea typeface="Calibri" pitchFamily="34" charset="-122"/>
                 <a:cs typeface="Calibri" pitchFamily="34" charset="-120"/>
               </a:rPr>
-              <a:t>Je m'appelle Huong  •  GV. Đỗ Thùy Hương  •  EC1103</a:t>
+              <a:t>Je m'appelle Huong  •  GV. Đỗ Thùy Hương  •  EC6000TX</a:t>
             </a:r>
             <a:endParaRPr lang="en-US" sz="900" dirty="0"/>
           </a:p>
@@ -7921,7 +7921,7 @@
                 <a:ea typeface="Calibri" pitchFamily="34" charset="-122"/>
                 <a:cs typeface="Calibri" pitchFamily="34" charset="-120"/>
               </a:rPr>
-              <a:t>Je m'appelle Huong  •  GV. Đỗ Thùy Hương  •  EC1103</a:t>
+              <a:t>Je m'appelle Huong  •  GV. Đỗ Thùy Hương  •  EC6000TX</a:t>
             </a:r>
             <a:endParaRPr lang="en-US" sz="900" dirty="0"/>
           </a:p>
